--- a/index/designs/y8-l8/l3-pinyin-text1/l3-pinyin-text1.pptx
+++ b/index/designs/y8-l8/l3-pinyin-text1/l3-pinyin-text1.pptx
@@ -2243,12 +2243,6 @@
               </a:rPr>
               <a:t>拼音</a:t>
             </a:r>
-            <a:pPr algn="ctr" indent="0" marL="0">
-              <a:spcBef>
-                <a:spcPts val="400"/>
-              </a:spcBef>
-              <a:buNone/>
-            </a:pPr>
             <a:r>
               <a:rPr lang="en-US" sz="5600" b="1" dirty="0">
                 <a:solidFill>
@@ -2260,12 +2254,6 @@
               </a:rPr>
               <a:t>·</a:t>
             </a:r>
-            <a:pPr algn="ctr" indent="0" marL="0">
-              <a:spcBef>
-                <a:spcPts val="400"/>
-              </a:spcBef>
-              <a:buNone/>
-            </a:pPr>
             <a:r>
               <a:rPr lang="en-US" sz="5600" dirty="0">
                 <a:solidFill>
@@ -2869,15 +2857,6 @@
               </a:rPr>
               <a:t>Class reads </a:t>
             </a:r>
-            <a:pPr algn="l" indent="0" marL="0">
-              <a:lnSpc>
-                <a:spcPts val="1680"/>
-              </a:lnSpc>
-              <a:spcAft>
-                <a:spcPts val="600"/>
-              </a:spcAft>
-              <a:buNone/>
-            </a:pPr>
             <a:r>
               <a:rPr lang="en-US" sz="1200" b="1" dirty="0">
                 <a:solidFill>
@@ -2889,15 +2868,6 @@
               </a:rPr>
               <a:t>Text 1 chorally twice</a:t>
             </a:r>
-            <a:pPr algn="l" indent="0" marL="0">
-              <a:lnSpc>
-                <a:spcPts val="1680"/>
-              </a:lnSpc>
-              <a:spcAft>
-                <a:spcPts val="600"/>
-              </a:spcAft>
-              <a:buNone/>
-            </a:pPr>
             <a:r>
               <a:rPr lang="en-US" sz="1200" dirty="0">
                 <a:solidFill>
@@ -2933,15 +2903,6 @@
               </a:rPr>
               <a:t>Whole group answers the </a:t>
             </a:r>
-            <a:pPr algn="l" indent="0" marL="0">
-              <a:lnSpc>
-                <a:spcPts val="1680"/>
-              </a:lnSpc>
-              <a:spcAft>
-                <a:spcPts val="600"/>
-              </a:spcAft>
-              <a:buNone/>
-            </a:pPr>
             <a:r>
               <a:rPr lang="en-US" sz="1200" b="1" dirty="0">
                 <a:solidFill>
@@ -2953,15 +2914,6 @@
               </a:rPr>
               <a:t>4 comprehension questions</a:t>
             </a:r>
-            <a:pPr algn="l" indent="0" marL="0">
-              <a:lnSpc>
-                <a:spcPts val="1680"/>
-              </a:lnSpc>
-              <a:spcAft>
-                <a:spcPts val="600"/>
-              </a:spcAft>
-              <a:buNone/>
-            </a:pPr>
             <a:r>
               <a:rPr lang="en-US" sz="1200" dirty="0">
                 <a:solidFill>
@@ -2997,15 +2949,6 @@
               </a:rPr>
               <a:t>Use the sentence starter </a:t>
             </a:r>
-            <a:pPr algn="l" indent="0" marL="0">
-              <a:lnSpc>
-                <a:spcPts val="1680"/>
-              </a:lnSpc>
-              <a:spcAft>
-                <a:spcPts val="600"/>
-              </a:spcAft>
-              <a:buNone/>
-            </a:pPr>
             <a:r>
               <a:rPr lang="en-US" sz="1200" b="1" dirty="0">
                 <a:solidFill>
@@ -3017,15 +2960,6 @@
               </a:rPr>
               <a:t>他每天……</a:t>
             </a:r>
-            <a:pPr algn="l" indent="0" marL="0">
-              <a:lnSpc>
-                <a:spcPts val="1680"/>
-              </a:lnSpc>
-              <a:spcAft>
-                <a:spcPts val="600"/>
-              </a:spcAft>
-              <a:buNone/>
-            </a:pPr>
             <a:r>
               <a:rPr lang="en-US" sz="1200" dirty="0">
                 <a:solidFill>
@@ -3061,15 +2995,6 @@
               </a:rPr>
               <a:t>Extension: restate the answer as a </a:t>
             </a:r>
-            <a:pPr algn="l" indent="0" marL="0">
-              <a:lnSpc>
-                <a:spcPts val="1680"/>
-              </a:lnSpc>
-              <a:spcAft>
-                <a:spcPts val="600"/>
-              </a:spcAft>
-              <a:buNone/>
-            </a:pPr>
             <a:r>
               <a:rPr lang="en-US" sz="1200" b="1" dirty="0">
                 <a:solidFill>
@@ -3081,15 +3006,6 @@
               </a:rPr>
               <a:t>full Chinese sentence</a:t>
             </a:r>
-            <a:pPr algn="l" indent="0" marL="0">
-              <a:lnSpc>
-                <a:spcPts val="1680"/>
-              </a:lnSpc>
-              <a:spcAft>
-                <a:spcPts val="600"/>
-              </a:spcAft>
-              <a:buNone/>
-            </a:pPr>
             <a:r>
               <a:rPr lang="en-US" sz="1200" dirty="0">
                 <a:solidFill>
@@ -3328,9 +3244,6 @@
               </a:rPr>
               <a:t>Q1</a:t>
             </a:r>
-            <a:pPr algn="l" indent="0" marL="0">
-              <a:buNone/>
-            </a:pPr>
             <a:r>
               <a:rPr lang="en-US" sz="1000" dirty="0">
                 <a:solidFill>
@@ -3359,9 +3272,6 @@
               </a:rPr>
               <a:t>Q2</a:t>
             </a:r>
-            <a:pPr algn="l" indent="0" marL="0">
-              <a:buNone/>
-            </a:pPr>
             <a:r>
               <a:rPr lang="en-US" sz="1000" dirty="0">
                 <a:solidFill>
@@ -3390,9 +3300,6 @@
               </a:rPr>
               <a:t>Q3</a:t>
             </a:r>
-            <a:pPr algn="l" indent="0" marL="0">
-              <a:buNone/>
-            </a:pPr>
             <a:r>
               <a:rPr lang="en-US" sz="1000" dirty="0">
                 <a:solidFill>
@@ -3421,9 +3328,6 @@
               </a:rPr>
               <a:t>Q4</a:t>
             </a:r>
-            <a:pPr algn="l" indent="0" marL="0">
-              <a:buNone/>
-            </a:pPr>
             <a:r>
               <a:rPr lang="en-US" sz="1000" dirty="0">
                 <a:solidFill>
@@ -4321,15 +4225,6 @@
               </a:rPr>
               <a:t>Teacher says a </a:t>
             </a:r>
-            <a:pPr algn="l" indent="0" marL="0">
-              <a:lnSpc>
-                <a:spcPts val="1680"/>
-              </a:lnSpc>
-              <a:spcAft>
-                <a:spcPts val="600"/>
-              </a:spcAft>
-              <a:buNone/>
-            </a:pPr>
             <a:r>
               <a:rPr lang="en-US" sz="1200" b="1" dirty="0">
                 <a:solidFill>
@@ -4341,15 +4236,6 @@
               </a:rPr>
               <a:t>duration phrase in English</a:t>
             </a:r>
-            <a:pPr algn="l" indent="0" marL="0">
-              <a:lnSpc>
-                <a:spcPts val="1680"/>
-              </a:lnSpc>
-              <a:spcAft>
-                <a:spcPts val="600"/>
-              </a:spcAft>
-              <a:buNone/>
-            </a:pPr>
             <a:r>
               <a:rPr lang="en-US" sz="1200" dirty="0">
                 <a:solidFill>
@@ -4385,15 +4271,6 @@
               </a:rPr>
               <a:t>First student</a:t>
             </a:r>
-            <a:pPr algn="l" indent="0" marL="0">
-              <a:lnSpc>
-                <a:spcPts val="1680"/>
-              </a:lnSpc>
-              <a:spcAft>
-                <a:spcPts val="600"/>
-              </a:spcAft>
-              <a:buNone/>
-            </a:pPr>
             <a:r>
               <a:rPr lang="en-US" sz="1200" dirty="0">
                 <a:solidFill>
@@ -4429,15 +4306,6 @@
               </a:rPr>
               <a:t>That student then says a </a:t>
             </a:r>
-            <a:pPr algn="l" indent="0" marL="0">
-              <a:lnSpc>
-                <a:spcPts val="1680"/>
-              </a:lnSpc>
-              <a:spcAft>
-                <a:spcPts val="600"/>
-              </a:spcAft>
-              <a:buNone/>
-            </a:pPr>
             <a:r>
               <a:rPr lang="en-US" sz="1200" b="1" dirty="0">
                 <a:solidFill>
@@ -4449,15 +4317,6 @@
               </a:rPr>
               <a:t>new duration phrase</a:t>
             </a:r>
-            <a:pPr algn="l" indent="0" marL="0">
-              <a:lnSpc>
-                <a:spcPts val="1680"/>
-              </a:lnSpc>
-              <a:spcAft>
-                <a:spcPts val="600"/>
-              </a:spcAft>
-              <a:buNone/>
-            </a:pPr>
             <a:r>
               <a:rPr lang="en-US" sz="1200" dirty="0">
                 <a:solidFill>
@@ -4493,15 +4352,6 @@
               </a:rPr>
               <a:t>Continue </a:t>
             </a:r>
-            <a:pPr algn="l" indent="0" marL="0">
-              <a:lnSpc>
-                <a:spcPts val="1680"/>
-              </a:lnSpc>
-              <a:spcAft>
-                <a:spcPts val="600"/>
-              </a:spcAft>
-              <a:buNone/>
-            </a:pPr>
             <a:r>
               <a:rPr lang="en-US" sz="1200" b="1" dirty="0">
                 <a:solidFill>
@@ -4513,15 +4363,6 @@
               </a:rPr>
               <a:t>round the room</a:t>
             </a:r>
-            <a:pPr algn="l" indent="0" marL="0">
-              <a:lnSpc>
-                <a:spcPts val="1680"/>
-              </a:lnSpc>
-              <a:spcAft>
-                <a:spcPts val="600"/>
-              </a:spcAft>
-              <a:buNone/>
-            </a:pPr>
             <a:r>
               <a:rPr lang="en-US" sz="1200" dirty="0">
                 <a:solidFill>
@@ -4608,9 +4449,6 @@
               </a:rPr>
               <a:t>Extension: combine your duration with a sport — </a:t>
             </a:r>
-            <a:pPr algn="l" indent="0" marL="0">
-              <a:buNone/>
-            </a:pPr>
             <a:r>
               <a:rPr lang="en-US" sz="1100" b="1" dirty="0">
                 <a:solidFill>
@@ -4732,9 +4570,6 @@
               </a:rPr>
               <a:t>天 </a:t>
             </a:r>
-            <a:pPr algn="l" indent="0" marL="0">
-              <a:buNone/>
-            </a:pPr>
             <a:r>
               <a:rPr lang="en-US" sz="900" b="1" dirty="0">
                 <a:solidFill>
@@ -4763,9 +4598,6 @@
               </a:rPr>
               <a:t>星期 </a:t>
             </a:r>
-            <a:pPr algn="l" indent="0" marL="0">
-              <a:buNone/>
-            </a:pPr>
             <a:r>
               <a:rPr lang="en-US" sz="900" b="1" dirty="0">
                 <a:solidFill>
@@ -4794,9 +4626,6 @@
               </a:rPr>
               <a:t>月 </a:t>
             </a:r>
-            <a:pPr algn="l" indent="0" marL="0">
-              <a:buNone/>
-            </a:pPr>
             <a:r>
               <a:rPr lang="en-US" sz="900" b="1" dirty="0">
                 <a:solidFill>
@@ -4825,9 +4654,6 @@
               </a:rPr>
               <a:t>小时 </a:t>
             </a:r>
-            <a:pPr algn="l" indent="0" marL="0">
-              <a:buNone/>
-            </a:pPr>
             <a:r>
               <a:rPr lang="en-US" sz="900" b="1" dirty="0">
                 <a:solidFill>
@@ -4856,9 +4682,6 @@
               </a:rPr>
               <a:t>分钟 </a:t>
             </a:r>
-            <a:pPr algn="l" indent="0" marL="0">
-              <a:buNone/>
-            </a:pPr>
             <a:r>
               <a:rPr lang="en-US" sz="900" b="1" dirty="0">
                 <a:solidFill>
@@ -5908,12 +5731,6 @@
               </a:rPr>
               <a:t>Listen</a:t>
             </a:r>
-            <a:pPr algn="l" indent="0" marL="0">
-              <a:lnSpc>
-                <a:spcPts val="1170"/>
-              </a:lnSpc>
-              <a:buNone/>
-            </a:pPr>
             <a:r>
               <a:rPr lang="en-US" sz="900" dirty="0">
                 <a:solidFill>
@@ -5999,12 +5816,6 @@
               </a:rPr>
               <a:t>Tick</a:t>
             </a:r>
-            <a:pPr algn="l" indent="0" marL="0">
-              <a:lnSpc>
-                <a:spcPts val="1170"/>
-              </a:lnSpc>
-              <a:buNone/>
-            </a:pPr>
             <a:r>
               <a:rPr lang="en-US" sz="900" dirty="0">
                 <a:solidFill>
@@ -6090,12 +5901,6 @@
               </a:rPr>
               <a:t>Self-mark</a:t>
             </a:r>
-            <a:pPr algn="l" indent="0" marL="0">
-              <a:lnSpc>
-                <a:spcPts val="1170"/>
-              </a:lnSpc>
-              <a:buNone/>
-            </a:pPr>
             <a:r>
               <a:rPr lang="en-US" sz="900" dirty="0">
                 <a:solidFill>
@@ -6146,9 +5951,6 @@
               </a:rPr>
               <a:t>Grid Format · 6 People × 8 Activities </a:t>
             </a:r>
-            <a:pPr algn="l" indent="0" marL="0">
-              <a:buNone/>
-            </a:pPr>
             <a:r>
               <a:rPr lang="en-US" sz="1000" dirty="0">
                 <a:solidFill>
@@ -6425,9 +6227,6 @@
               <a:t>跑步
 </a:t>
             </a:r>
-            <a:pPr algn="ctr" indent="0" marL="0">
-              <a:buNone/>
-            </a:pPr>
             <a:r>
               <a:rPr lang="en-US" sz="800" dirty="0">
                 <a:solidFill>
@@ -6525,9 +6324,6 @@
               <a:t>游泳
 </a:t>
             </a:r>
-            <a:pPr algn="ctr" indent="0" marL="0">
-              <a:buNone/>
-            </a:pPr>
             <a:r>
               <a:rPr lang="en-US" sz="800" dirty="0">
                 <a:solidFill>
@@ -6625,9 +6421,6 @@
               <a:t>打网球
 </a:t>
             </a:r>
-            <a:pPr algn="ctr" indent="0" marL="0">
-              <a:buNone/>
-            </a:pPr>
             <a:r>
               <a:rPr lang="en-US" sz="800" dirty="0">
                 <a:solidFill>
@@ -6725,9 +6518,6 @@
               <a:t>打篮球
 </a:t>
             </a:r>
-            <a:pPr algn="ctr" indent="0" marL="0">
-              <a:buNone/>
-            </a:pPr>
             <a:r>
               <a:rPr lang="en-US" sz="800" dirty="0">
                 <a:solidFill>
@@ -8256,12 +8046,6 @@
               </a:rPr>
               <a:t>Full printed grid continues for all </a:t>
             </a:r>
-            <a:pPr algn="l" indent="0" marL="0">
-              <a:spcBef>
-                <a:spcPts val="600"/>
-              </a:spcBef>
-              <a:buNone/>
-            </a:pPr>
             <a:r>
               <a:rPr lang="en-US" sz="900" b="1" dirty="0">
                 <a:solidFill>
@@ -8273,12 +8057,6 @@
               </a:rPr>
               <a:t>6 people × 8 activities</a:t>
             </a:r>
-            <a:pPr algn="l" indent="0" marL="0">
-              <a:spcBef>
-                <a:spcPts val="600"/>
-              </a:spcBef>
-              <a:buNone/>
-            </a:pPr>
             <a:r>
               <a:rPr lang="en-US" sz="900" dirty="0">
                 <a:solidFill>
@@ -9030,12 +8808,6 @@
               </a:rPr>
               <a:t>Teacher says a sentence about Text 1. Judge </a:t>
             </a:r>
-            <a:pPr algn="l" indent="0" marL="0">
-              <a:spcBef>
-                <a:spcPts val="800"/>
-              </a:spcBef>
-              <a:buNone/>
-            </a:pPr>
             <a:r>
               <a:rPr lang="en-US" sz="1200" b="1" dirty="0">
                 <a:solidFill>
@@ -9047,12 +8819,6 @@
               </a:rPr>
               <a:t>live</a:t>
             </a:r>
-            <a:pPr algn="l" indent="0" marL="0">
-              <a:spcBef>
-                <a:spcPts val="800"/>
-              </a:spcBef>
-              <a:buNone/>
-            </a:pPr>
             <a:r>
               <a:rPr lang="en-US" sz="1200" dirty="0">
                 <a:solidFill>
@@ -9064,12 +8830,6 @@
               </a:rPr>
               <a:t> — show 👍 👎 </a:t>
             </a:r>
-            <a:pPr algn="l" indent="0" marL="0">
-              <a:spcBef>
-                <a:spcPts val="800"/>
-              </a:spcBef>
-              <a:buNone/>
-            </a:pPr>
             <a:r>
               <a:rPr lang="en-US" sz="1200" b="1" dirty="0">
                 <a:solidFill>
@@ -9081,12 +8841,6 @@
               </a:rPr>
               <a:t>instantly</a:t>
             </a:r>
-            <a:pPr algn="l" indent="0" marL="0">
-              <a:spcBef>
-                <a:spcPts val="800"/>
-              </a:spcBef>
-              <a:buNone/>
-            </a:pPr>
             <a:r>
               <a:rPr lang="en-US" sz="1200" dirty="0">
                 <a:solidFill>
@@ -9890,12 +9644,6 @@
               </a:rPr>
               <a:t>Setup needed:</a:t>
             </a:r>
-            <a:pPr algn="ctr" indent="0" marL="0">
-              <a:spcBef>
-                <a:spcPts val="1000"/>
-              </a:spcBef>
-              <a:buNone/>
-            </a:pPr>
             <a:r>
               <a:rPr lang="en-US" sz="900" dirty="0">
                 <a:solidFill>
@@ -10512,15 +10260,6 @@
               </a:rPr>
               <a:t>Teacher reads each criterion — class gives an example: </a:t>
             </a:r>
-            <a:pPr algn="l" indent="0" marL="0">
-              <a:lnSpc>
-                <a:spcPts val="1260"/>
-              </a:lnSpc>
-              <a:spcBef>
-                <a:spcPts val="1000"/>
-              </a:spcBef>
-              <a:buNone/>
-            </a:pPr>
             <a:r>
               <a:rPr lang="en-US" sz="900" b="1" dirty="0">
                 <a:solidFill>
@@ -10532,15 +10271,6 @@
               </a:rPr>
               <a:t>a word with ou, a fact from the text, a duration sentence</a:t>
             </a:r>
-            <a:pPr algn="l" indent="0" marL="0">
-              <a:lnSpc>
-                <a:spcPts val="1260"/>
-              </a:lnSpc>
-              <a:spcBef>
-                <a:spcPts val="1000"/>
-              </a:spcBef>
-              <a:buNone/>
-            </a:pPr>
             <a:r>
               <a:rPr lang="en-US" sz="900" dirty="0">
                 <a:solidFill>
@@ -12061,15 +11791,6 @@
               </a:rPr>
               <a:t>Two students</a:t>
             </a:r>
-            <a:pPr algn="l" indent="0" marL="0">
-              <a:lnSpc>
-                <a:spcPts val="1680"/>
-              </a:lnSpc>
-              <a:spcAft>
-                <a:spcPts val="600"/>
-              </a:spcAft>
-              <a:buNone/>
-            </a:pPr>
             <a:r>
               <a:rPr lang="en-US" sz="1200" dirty="0">
                 <a:solidFill>
@@ -12105,15 +11826,6 @@
               </a:rPr>
               <a:t>Teacher says a sport in Chinese — students </a:t>
             </a:r>
-            <a:pPr algn="l" indent="0" marL="0">
-              <a:lnSpc>
-                <a:spcPts val="1680"/>
-              </a:lnSpc>
-              <a:spcAft>
-                <a:spcPts val="600"/>
-              </a:spcAft>
-              <a:buNone/>
-            </a:pPr>
             <a:r>
               <a:rPr lang="en-US" sz="1200" b="1" dirty="0">
                 <a:solidFill>
@@ -12125,15 +11837,6 @@
               </a:rPr>
               <a:t>slap the matching</a:t>
             </a:r>
-            <a:pPr algn="l" indent="0" marL="0">
-              <a:lnSpc>
-                <a:spcPts val="1680"/>
-              </a:lnSpc>
-              <a:spcAft>
-                <a:spcPts val="600"/>
-              </a:spcAft>
-              <a:buNone/>
-            </a:pPr>
             <a:r>
               <a:rPr lang="en-US" sz="1200" dirty="0">
                 <a:solidFill>
@@ -12169,15 +11872,6 @@
               </a:rPr>
               <a:t>Quick recap: </a:t>
             </a:r>
-            <a:pPr algn="l" indent="0" marL="0">
-              <a:lnSpc>
-                <a:spcPts val="1680"/>
-              </a:lnSpc>
-              <a:spcAft>
-                <a:spcPts val="600"/>
-              </a:spcAft>
-              <a:buNone/>
-            </a:pPr>
             <a:r>
               <a:rPr lang="en-US" sz="1200" b="1" dirty="0">
                 <a:solidFill>
@@ -12189,15 +11883,6 @@
               </a:rPr>
               <a:t>打</a:t>
             </a:r>
-            <a:pPr algn="l" indent="0" marL="0">
-              <a:lnSpc>
-                <a:spcPts val="1680"/>
-              </a:lnSpc>
-              <a:spcAft>
-                <a:spcPts val="600"/>
-              </a:spcAft>
-              <a:buNone/>
-            </a:pPr>
             <a:r>
               <a:rPr lang="en-US" sz="1200" dirty="0">
                 <a:solidFill>
@@ -12209,15 +11894,6 @@
               </a:rPr>
               <a:t> for hit-sports, </a:t>
             </a:r>
-            <a:pPr algn="l" indent="0" marL="0">
-              <a:lnSpc>
-                <a:spcPts val="1680"/>
-              </a:lnSpc>
-              <a:spcAft>
-                <a:spcPts val="600"/>
-              </a:spcAft>
-              <a:buNone/>
-            </a:pPr>
             <a:r>
               <a:rPr lang="en-US" sz="1200" b="1" dirty="0">
                 <a:solidFill>
@@ -12229,15 +11905,6 @@
               </a:rPr>
               <a:t>踢</a:t>
             </a:r>
-            <a:pPr algn="l" indent="0" marL="0">
-              <a:lnSpc>
-                <a:spcPts val="1680"/>
-              </a:lnSpc>
-              <a:spcAft>
-                <a:spcPts val="600"/>
-              </a:spcAft>
-              <a:buNone/>
-            </a:pPr>
             <a:r>
               <a:rPr lang="en-US" sz="1200" dirty="0">
                 <a:solidFill>
@@ -12249,15 +11916,6 @@
               </a:rPr>
               <a:t> for kick-sports — some sports take </a:t>
             </a:r>
-            <a:pPr algn="l" indent="0" marL="0">
-              <a:lnSpc>
-                <a:spcPts val="1680"/>
-              </a:lnSpc>
-              <a:spcAft>
-                <a:spcPts val="600"/>
-              </a:spcAft>
-              <a:buNone/>
-            </a:pPr>
             <a:r>
               <a:rPr lang="en-US" sz="1200" b="1" dirty="0">
                 <a:solidFill>
@@ -12269,15 +11927,6 @@
               </a:rPr>
               <a:t>no verb</a:t>
             </a:r>
-            <a:pPr algn="l" indent="0" marL="0">
-              <a:lnSpc>
-                <a:spcPts val="1680"/>
-              </a:lnSpc>
-              <a:spcAft>
-                <a:spcPts val="600"/>
-              </a:spcAft>
-              <a:buNone/>
-            </a:pPr>
             <a:r>
               <a:rPr lang="en-US" sz="1200" dirty="0">
                 <a:solidFill>
@@ -12949,9 +12598,6 @@
               </a:rPr>
               <a:t>"You can already name </a:t>
             </a:r>
-            <a:pPr algn="l" indent="0" marL="0">
-              <a:buNone/>
-            </a:pPr>
             <a:r>
               <a:rPr lang="en-US" sz="1300" b="1" dirty="0">
                 <a:solidFill>
@@ -12963,9 +12609,6 @@
               </a:rPr>
               <a:t>11 sports</a:t>
             </a:r>
-            <a:pPr algn="l" indent="0" marL="0">
-              <a:buNone/>
-            </a:pPr>
             <a:r>
               <a:rPr lang="en-US" sz="1300" dirty="0">
                 <a:solidFill>
@@ -12977,9 +12620,6 @@
               </a:rPr>
               <a:t>. Today you'll hear them used in a real family story, and train your ear on two tricky vowel sounds — </a:t>
             </a:r>
-            <a:pPr algn="l" indent="0" marL="0">
-              <a:buNone/>
-            </a:pPr>
             <a:r>
               <a:rPr lang="en-US" sz="1300" b="1" dirty="0">
                 <a:solidFill>
@@ -12991,9 +12631,6 @@
               </a:rPr>
               <a:t>ou</a:t>
             </a:r>
-            <a:pPr algn="l" indent="0" marL="0">
-              <a:buNone/>
-            </a:pPr>
             <a:r>
               <a:rPr lang="en-US" sz="1300" dirty="0">
                 <a:solidFill>
@@ -13005,9 +12642,6 @@
               </a:rPr>
               <a:t> and </a:t>
             </a:r>
-            <a:pPr algn="l" indent="0" marL="0">
-              <a:buNone/>
-            </a:pPr>
             <a:r>
               <a:rPr lang="en-US" sz="1300" b="1" dirty="0">
                 <a:solidFill>
@@ -13019,9 +12653,6 @@
               </a:rPr>
               <a:t>uo</a:t>
             </a:r>
-            <a:pPr algn="l" indent="0" marL="0">
-              <a:buNone/>
-            </a:pPr>
             <a:r>
               <a:rPr lang="en-US" sz="1300" dirty="0">
                 <a:solidFill>
@@ -13793,12 +13424,6 @@
               </a:rPr>
               <a:t>We are learning to </a:t>
             </a:r>
-            <a:pPr algn="l" indent="0" marL="0">
-              <a:spcBef>
-                <a:spcPts val="400"/>
-              </a:spcBef>
-              <a:buNone/>
-            </a:pPr>
             <a:r>
               <a:rPr lang="en-US" sz="1400" b="1" dirty="0">
                 <a:solidFill>
@@ -13810,12 +13435,6 @@
               </a:rPr>
               <a:t>distinguish the ou/uo pinyin sounds</a:t>
             </a:r>
-            <a:pPr algn="l" indent="0" marL="0">
-              <a:spcBef>
-                <a:spcPts val="400"/>
-              </a:spcBef>
-              <a:buNone/>
-            </a:pPr>
             <a:r>
               <a:rPr lang="en-US" sz="1400" dirty="0">
                 <a:solidFill>
@@ -13937,9 +13556,6 @@
               </a:rPr>
               <a:t>I can hear the difference between </a:t>
             </a:r>
-            <a:pPr algn="l" indent="0" marL="0">
-              <a:buNone/>
-            </a:pPr>
             <a:r>
               <a:rPr lang="en-US" sz="1200" dirty="0">
                 <a:solidFill>
@@ -13951,9 +13567,6 @@
               </a:rPr>
               <a:t>ou</a:t>
             </a:r>
-            <a:pPr algn="l" indent="0" marL="0">
-              <a:buNone/>
-            </a:pPr>
             <a:r>
               <a:rPr lang="en-US" sz="1200" dirty="0">
                 <a:solidFill>
@@ -13965,9 +13578,6 @@
               </a:rPr>
               <a:t> and </a:t>
             </a:r>
-            <a:pPr algn="l" indent="0" marL="0">
-              <a:buNone/>
-            </a:pPr>
             <a:r>
               <a:rPr lang="en-US" sz="1200" dirty="0">
                 <a:solidFill>
@@ -13979,9 +13589,6 @@
               </a:rPr>
               <a:t>uo</a:t>
             </a:r>
-            <a:pPr algn="l" indent="0" marL="0">
-              <a:buNone/>
-            </a:pPr>
             <a:r>
               <a:rPr lang="en-US" sz="1200" dirty="0">
                 <a:solidFill>
@@ -13993,9 +13600,6 @@
               </a:rPr>
               <a:t> and write the </a:t>
             </a:r>
-            <a:pPr algn="l" indent="0" marL="0">
-              <a:buNone/>
-            </a:pPr>
             <a:r>
               <a:rPr lang="en-US" sz="1200" b="1" dirty="0">
                 <a:solidFill>
@@ -14117,9 +13721,6 @@
               </a:rPr>
               <a:t>I can read and understand </a:t>
             </a:r>
-            <a:pPr algn="l" indent="0" marL="0">
-              <a:buNone/>
-            </a:pPr>
             <a:r>
               <a:rPr lang="en-US" sz="1200" b="1" dirty="0">
                 <a:solidFill>
@@ -14131,9 +13732,6 @@
               </a:rPr>
               <a:t>Text 1 (高力's family)</a:t>
             </a:r>
-            <a:pPr algn="l" indent="0" marL="0">
-              <a:buNone/>
-            </a:pPr>
             <a:r>
               <a:rPr lang="en-US" sz="1200" dirty="0">
                 <a:solidFill>
@@ -14255,9 +13853,6 @@
               </a:rPr>
               <a:t>I can say how long someone does a sport using </a:t>
             </a:r>
-            <a:pPr algn="l" indent="0" marL="0">
-              <a:buNone/>
-            </a:pPr>
             <a:r>
               <a:rPr lang="en-US" sz="1200" b="1" dirty="0">
                 <a:solidFill>
@@ -14269,9 +13864,6 @@
               </a:rPr>
               <a:t>verb + duration + object</a:t>
             </a:r>
-            <a:pPr algn="l" indent="0" marL="0">
-              <a:buNone/>
-            </a:pPr>
             <a:r>
               <a:rPr lang="en-US" sz="1200" dirty="0">
                 <a:solidFill>
@@ -14283,9 +13875,6 @@
               </a:rPr>
               <a:t> — </a:t>
             </a:r>
-            <a:pPr algn="l" indent="0" marL="0">
-              <a:buNone/>
-            </a:pPr>
             <a:r>
               <a:rPr lang="en-US" sz="1200" dirty="0">
                 <a:solidFill>
@@ -14782,9 +14371,6 @@
               </a:rPr>
               <a:t>This is the </a:t>
             </a:r>
-            <a:pPr algn="l" indent="0" marL="0">
-              <a:buNone/>
-            </a:pPr>
             <a:r>
               <a:rPr lang="en-US" sz="1100" b="1" dirty="0">
                 <a:solidFill>
@@ -14796,9 +14382,6 @@
               </a:rPr>
               <a:t>only new word</a:t>
             </a:r>
-            <a:pPr algn="l" indent="0" marL="0">
-              <a:buNone/>
-            </a:pPr>
             <a:r>
               <a:rPr lang="en-US" sz="1100" dirty="0">
                 <a:solidFill>
@@ -15578,9 +15161,6 @@
               </a:rPr>
               <a:t>A smooth </a:t>
             </a:r>
-            <a:pPr algn="l" indent="0" marL="0">
-              <a:buNone/>
-            </a:pPr>
             <a:r>
               <a:rPr lang="en-US" sz="1100" b="1" dirty="0">
                 <a:solidFill>
@@ -15592,9 +15172,6 @@
               </a:rPr>
               <a:t>"oh-oo"</a:t>
             </a:r>
-            <a:pPr algn="l" indent="0" marL="0">
-              <a:buNone/>
-            </a:pPr>
             <a:r>
               <a:rPr lang="en-US" sz="1100" dirty="0">
                 <a:solidFill>
@@ -15607,9 +15184,6 @@
               <a:t> glide
 </a:t>
             </a:r>
-            <a:pPr algn="l" indent="0" marL="0">
-              <a:buNone/>
-            </a:pPr>
             <a:r>
               <a:rPr lang="en-US" sz="1100" b="1" dirty="0">
                 <a:solidFill>
@@ -15735,9 +15309,6 @@
               </a:rPr>
               <a:t>Starts with a rounded </a:t>
             </a:r>
-            <a:pPr algn="l" indent="0" marL="0">
-              <a:buNone/>
-            </a:pPr>
             <a:r>
               <a:rPr lang="en-US" sz="1100" b="1" dirty="0">
                 <a:solidFill>
@@ -15749,9 +15320,6 @@
               </a:rPr>
               <a:t>"w"</a:t>
             </a:r>
-            <a:pPr algn="l" indent="0" marL="0">
-              <a:buNone/>
-            </a:pPr>
             <a:r>
               <a:rPr lang="en-US" sz="1100" dirty="0">
                 <a:solidFill>
@@ -15764,9 +15332,6 @@
               <a:t> onset
 </a:t>
             </a:r>
-            <a:pPr algn="l" indent="0" marL="0">
-              <a:buNone/>
-            </a:pPr>
             <a:r>
               <a:rPr lang="en-US" sz="1100" b="1" dirty="0">
                 <a:solidFill>
@@ -16416,12 +15981,6 @@
               </a:rPr>
               <a:t>跑步 and 游泳 are two-part words (verb + object) — the duration slides </a:t>
             </a:r>
-            <a:pPr algn="l" indent="0" marL="0">
-              <a:spcBef>
-                <a:spcPts val="800"/>
-              </a:spcBef>
-              <a:buNone/>
-            </a:pPr>
             <a:r>
               <a:rPr lang="en-US" sz="1000" b="1" dirty="0">
                 <a:solidFill>
@@ -16433,12 +15992,6 @@
               </a:rPr>
               <a:t>in between</a:t>
             </a:r>
-            <a:pPr algn="l" indent="0" marL="0">
-              <a:spcBef>
-                <a:spcPts val="800"/>
-              </a:spcBef>
-              <a:buNone/>
-            </a:pPr>
             <a:r>
               <a:rPr lang="en-US" sz="1000" dirty="0">
                 <a:solidFill>
@@ -16450,12 +16003,6 @@
               </a:rPr>
               <a:t> the two parts. </a:t>
             </a:r>
-            <a:pPr algn="l" indent="0" marL="0">
-              <a:spcBef>
-                <a:spcPts val="800"/>
-              </a:spcBef>
-              <a:buNone/>
-            </a:pPr>
             <a:r>
               <a:rPr lang="en-US" sz="1000" b="1" dirty="0">
                 <a:solidFill>
@@ -16542,9 +16089,6 @@
               </a:rPr>
               <a:t>他每天跑</a:t>
             </a:r>
-            <a:pPr algn="l" indent="0" marL="0">
-              <a:buNone/>
-            </a:pPr>
             <a:r>
               <a:rPr lang="en-US" sz="1600" b="1" dirty="0">
                 <a:solidFill>
@@ -16556,9 +16100,6 @@
               </a:rPr>
               <a:t>一个小时</a:t>
             </a:r>
-            <a:pPr algn="l" indent="0" marL="0">
-              <a:buNone/>
-            </a:pPr>
             <a:r>
               <a:rPr lang="en-US" sz="1600" dirty="0">
                 <a:solidFill>
@@ -16684,9 +16225,6 @@
               </a:rPr>
               <a:t>她每天游</a:t>
             </a:r>
-            <a:pPr algn="l" indent="0" marL="0">
-              <a:buNone/>
-            </a:pPr>
             <a:r>
               <a:rPr lang="en-US" sz="1600" b="1" dirty="0">
                 <a:solidFill>
@@ -16698,9 +16236,6 @@
               </a:rPr>
               <a:t>半个小时</a:t>
             </a:r>
-            <a:pPr algn="l" indent="0" marL="0">
-              <a:buNone/>
-            </a:pPr>
             <a:r>
               <a:rPr lang="en-US" sz="1600" dirty="0">
                 <a:solidFill>
@@ -16826,9 +16361,6 @@
               </a:rPr>
               <a:t>他每天打</a:t>
             </a:r>
-            <a:pPr algn="l" indent="0" marL="0">
-              <a:buNone/>
-            </a:pPr>
             <a:r>
               <a:rPr lang="en-US" sz="1600" b="1" dirty="0">
                 <a:solidFill>
@@ -16840,9 +16372,6 @@
               </a:rPr>
               <a:t>一个小时</a:t>
             </a:r>
-            <a:pPr algn="l" indent="0" marL="0">
-              <a:buNone/>
-            </a:pPr>
             <a:r>
               <a:rPr lang="en-US" sz="1600" dirty="0">
                 <a:solidFill>
@@ -17213,9 +16742,6 @@
               </a:rPr>
               <a:t>"跑步 and 游泳 are actually </a:t>
             </a:r>
-            <a:pPr algn="l" indent="0" marL="0">
-              <a:buNone/>
-            </a:pPr>
             <a:r>
               <a:rPr lang="en-US" sz="1100" b="1" dirty="0">
                 <a:solidFill>
@@ -17227,9 +16753,6 @@
               </a:rPr>
               <a:t>two-part words</a:t>
             </a:r>
-            <a:pPr algn="l" indent="0" marL="0">
-              <a:buNone/>
-            </a:pPr>
             <a:r>
               <a:rPr lang="en-US" sz="1100" dirty="0">
                 <a:solidFill>
@@ -17241,9 +16764,6 @@
               </a:rPr>
               <a:t> — verb + object glued together. When I add a duration, it slides in between the two parts, and unlike some other duration sentences you've seen, these usually </a:t>
             </a:r>
-            <a:pPr algn="l" indent="0" marL="0">
-              <a:buNone/>
-            </a:pPr>
             <a:r>
               <a:rPr lang="en-US" sz="1100" b="1" dirty="0">
                 <a:solidFill>
@@ -17255,9 +16775,6 @@
               </a:rPr>
               <a:t>drop 的</a:t>
             </a:r>
-            <a:pPr algn="l" indent="0" marL="0">
-              <a:buNone/>
-            </a:pPr>
             <a:r>
               <a:rPr lang="en-US" sz="1100" dirty="0">
                 <a:solidFill>
@@ -17712,6 +17229,31 @@
               </a:rPr>
               <a:t>我叫高力。我们</a:t>
             </a:r>
+            <a:r>
+              <a:rPr lang="en-US" sz="1700" b="1" dirty="0">
+                <a:solidFill>
+                  <a:srgbClr val="3A7D8C"/>
+                </a:solidFill>
+                <a:latin typeface="Noto Serif SC" pitchFamily="34" charset="0"/>
+                <a:ea typeface="Noto Serif SC" pitchFamily="34" charset="-122"/>
+                <a:cs typeface="Noto Serif SC" pitchFamily="34" charset="-120"/>
+              </a:rPr>
+              <a:t>一家人</a:t>
+            </a:r>
+            <a:r>
+              <a:rPr lang="en-US" sz="1700" b="1" dirty="0">
+                <a:solidFill>
+                  <a:srgbClr val="1E2A38"/>
+                </a:solidFill>
+                <a:latin typeface="Noto Serif SC" pitchFamily="34" charset="0"/>
+                <a:ea typeface="Noto Serif SC" pitchFamily="34" charset="-122"/>
+                <a:cs typeface="Noto Serif SC" pitchFamily="34" charset="-120"/>
+              </a:rPr>
+              <a:t>都喜欢运动。</a:t>
+            </a:r>
+            <a:endParaRPr lang="en-US" sz="1700" dirty="0"/>
+          </a:p>
+          <a:p>
             <a:pPr algn="l" indent="0" marL="0">
               <a:lnSpc>
                 <a:spcPts val="2975"/>
@@ -17721,14 +17263,39 @@
             <a:r>
               <a:rPr lang="en-US" sz="1700" b="1" dirty="0">
                 <a:solidFill>
-                  <a:srgbClr val="3A7D8C"/>
+                  <a:srgbClr val="1E2A38"/>
                 </a:solidFill>
                 <a:latin typeface="Noto Serif SC" pitchFamily="34" charset="0"/>
                 <a:ea typeface="Noto Serif SC" pitchFamily="34" charset="-122"/>
                 <a:cs typeface="Noto Serif SC" pitchFamily="34" charset="-120"/>
               </a:rPr>
-              <a:t>一家人</a:t>
-            </a:r>
+              <a:t>我爸爸喜欢跑步。他每天跑</a:t>
+            </a:r>
+            <a:r>
+              <a:rPr lang="en-US" sz="1700" b="1" dirty="0">
+                <a:solidFill>
+                  <a:srgbClr val="C8943E"/>
+                </a:solidFill>
+                <a:latin typeface="Noto Serif SC" pitchFamily="34" charset="0"/>
+                <a:ea typeface="Noto Serif SC" pitchFamily="34" charset="-122"/>
+                <a:cs typeface="Noto Serif SC" pitchFamily="34" charset="-120"/>
+              </a:rPr>
+              <a:t>一个小时</a:t>
+            </a:r>
+            <a:r>
+              <a:rPr lang="en-US" sz="1700" b="1" dirty="0">
+                <a:solidFill>
+                  <a:srgbClr val="1E2A38"/>
+                </a:solidFill>
+                <a:latin typeface="Noto Serif SC" pitchFamily="34" charset="0"/>
+                <a:ea typeface="Noto Serif SC" pitchFamily="34" charset="-122"/>
+                <a:cs typeface="Noto Serif SC" pitchFamily="34" charset="-120"/>
+              </a:rPr>
+              <a:t>步。</a:t>
+            </a:r>
+            <a:endParaRPr lang="en-US" sz="1700" dirty="0"/>
+          </a:p>
+          <a:p>
             <a:pPr algn="l" indent="0" marL="0">
               <a:lnSpc>
                 <a:spcPts val="2975"/>
@@ -17744,7 +17311,7 @@
                 <a:ea typeface="Noto Serif SC" pitchFamily="34" charset="-122"/>
                 <a:cs typeface="Noto Serif SC" pitchFamily="34" charset="-120"/>
               </a:rPr>
-              <a:t>都喜欢运动。</a:t>
+              <a:t>我妈妈喜欢游泳。她每天早上游泳。</a:t>
             </a:r>
             <a:endParaRPr lang="en-US" sz="1700" dirty="0"/>
           </a:p>
@@ -17764,80 +17331,6 @@
                 <a:ea typeface="Noto Serif SC" pitchFamily="34" charset="-122"/>
                 <a:cs typeface="Noto Serif SC" pitchFamily="34" charset="-120"/>
               </a:rPr>
-              <a:t>我爸爸喜欢跑步。他每天跑</a:t>
-            </a:r>
-            <a:pPr algn="l" indent="0" marL="0">
-              <a:lnSpc>
-                <a:spcPts val="2975"/>
-              </a:lnSpc>
-              <a:buNone/>
-            </a:pPr>
-            <a:r>
-              <a:rPr lang="en-US" sz="1700" b="1" dirty="0">
-                <a:solidFill>
-                  <a:srgbClr val="C8943E"/>
-                </a:solidFill>
-                <a:latin typeface="Noto Serif SC" pitchFamily="34" charset="0"/>
-                <a:ea typeface="Noto Serif SC" pitchFamily="34" charset="-122"/>
-                <a:cs typeface="Noto Serif SC" pitchFamily="34" charset="-120"/>
-              </a:rPr>
-              <a:t>一个小时</a:t>
-            </a:r>
-            <a:pPr algn="l" indent="0" marL="0">
-              <a:lnSpc>
-                <a:spcPts val="2975"/>
-              </a:lnSpc>
-              <a:buNone/>
-            </a:pPr>
-            <a:r>
-              <a:rPr lang="en-US" sz="1700" b="1" dirty="0">
-                <a:solidFill>
-                  <a:srgbClr val="1E2A38"/>
-                </a:solidFill>
-                <a:latin typeface="Noto Serif SC" pitchFamily="34" charset="0"/>
-                <a:ea typeface="Noto Serif SC" pitchFamily="34" charset="-122"/>
-                <a:cs typeface="Noto Serif SC" pitchFamily="34" charset="-120"/>
-              </a:rPr>
-              <a:t>步。</a:t>
-            </a:r>
-            <a:endParaRPr lang="en-US" sz="1700" dirty="0"/>
-          </a:p>
-          <a:p>
-            <a:pPr algn="l" indent="0" marL="0">
-              <a:lnSpc>
-                <a:spcPts val="2975"/>
-              </a:lnSpc>
-              <a:buNone/>
-            </a:pPr>
-            <a:r>
-              <a:rPr lang="en-US" sz="1700" b="1" dirty="0">
-                <a:solidFill>
-                  <a:srgbClr val="1E2A38"/>
-                </a:solidFill>
-                <a:latin typeface="Noto Serif SC" pitchFamily="34" charset="0"/>
-                <a:ea typeface="Noto Serif SC" pitchFamily="34" charset="-122"/>
-                <a:cs typeface="Noto Serif SC" pitchFamily="34" charset="-120"/>
-              </a:rPr>
-              <a:t>我妈妈喜欢游泳。她每天早上游泳。</a:t>
-            </a:r>
-            <a:endParaRPr lang="en-US" sz="1700" dirty="0"/>
-          </a:p>
-          <a:p>
-            <a:pPr algn="l" indent="0" marL="0">
-              <a:lnSpc>
-                <a:spcPts val="2975"/>
-              </a:lnSpc>
-              <a:buNone/>
-            </a:pPr>
-            <a:r>
-              <a:rPr lang="en-US" sz="1700" b="1" dirty="0">
-                <a:solidFill>
-                  <a:srgbClr val="1E2A38"/>
-                </a:solidFill>
-                <a:latin typeface="Noto Serif SC" pitchFamily="34" charset="0"/>
-                <a:ea typeface="Noto Serif SC" pitchFamily="34" charset="-122"/>
-                <a:cs typeface="Noto Serif SC" pitchFamily="34" charset="-120"/>
-              </a:rPr>
               <a:t>我呢，我喜欢跟朋友一起打网球。</a:t>
             </a:r>
             <a:endParaRPr lang="en-US" sz="1700" dirty="0"/>
@@ -17879,9 +17372,6 @@
               </a:rPr>
               <a:t>1</a:t>
             </a:r>
-            <a:pPr algn="l" indent="0" marL="0">
-              <a:buNone/>
-            </a:pPr>
             <a:r>
               <a:rPr lang="en-US" sz="900" dirty="0">
                 <a:solidFill>
@@ -17971,9 +17461,6 @@
               </a:rPr>
               <a:t>2</a:t>
             </a:r>
-            <a:pPr algn="l" indent="0" marL="0">
-              <a:buNone/>
-            </a:pPr>
             <a:r>
               <a:rPr lang="en-US" sz="900" dirty="0">
                 <a:solidFill>
@@ -18063,9 +17550,6 @@
               </a:rPr>
               <a:t>3</a:t>
             </a:r>
-            <a:pPr algn="l" indent="0" marL="0">
-              <a:buNone/>
-            </a:pPr>
             <a:r>
               <a:rPr lang="en-US" sz="900" dirty="0">
                 <a:solidFill>
@@ -18353,9 +17837,6 @@
               </a:rPr>
               <a:t>Q1</a:t>
             </a:r>
-            <a:pPr algn="l" indent="0" marL="0">
-              <a:buNone/>
-            </a:pPr>
             <a:r>
               <a:rPr lang="en-US" sz="1100" dirty="0">
                 <a:solidFill>
@@ -18384,9 +17865,6 @@
               </a:rPr>
               <a:t>Q2</a:t>
             </a:r>
-            <a:pPr algn="l" indent="0" marL="0">
-              <a:buNone/>
-            </a:pPr>
             <a:r>
               <a:rPr lang="en-US" sz="1100" dirty="0">
                 <a:solidFill>
@@ -18415,9 +17893,6 @@
               </a:rPr>
               <a:t>Q3</a:t>
             </a:r>
-            <a:pPr algn="l" indent="0" marL="0">
-              <a:buNone/>
-            </a:pPr>
             <a:r>
               <a:rPr lang="en-US" sz="1100" dirty="0">
                 <a:solidFill>
@@ -18446,9 +17921,6 @@
               </a:rPr>
               <a:t>Q4</a:t>
             </a:r>
-            <a:pPr algn="l" indent="0" marL="0">
-              <a:buNone/>
-            </a:pPr>
             <a:r>
               <a:rPr lang="en-US" sz="1100" dirty="0">
                 <a:solidFill>
@@ -18753,12 +18225,6 @@
               </a:rPr>
               <a:t>Write your answer on your mini whiteboard </a:t>
             </a:r>
-            <a:pPr algn="l" indent="0" marL="0">
-              <a:spcBef>
-                <a:spcPts val="400"/>
-              </a:spcBef>
-              <a:buNone/>
-            </a:pPr>
             <a:r>
               <a:rPr lang="en-US" sz="900" b="1" dirty="0">
                 <a:solidFill>
@@ -18916,9 +18382,6 @@
               </a:rPr>
               <a:t>Which word has the </a:t>
             </a:r>
-            <a:pPr algn="l" indent="0" marL="0">
-              <a:buNone/>
-            </a:pPr>
             <a:r>
               <a:rPr lang="en-US" sz="1600" b="1" dirty="0">
                 <a:solidFill>
@@ -18930,9 +18393,6 @@
               </a:rPr>
               <a:t>uo</a:t>
             </a:r>
-            <a:pPr algn="l" indent="0" marL="0">
-              <a:buNone/>
-            </a:pPr>
             <a:r>
               <a:rPr lang="en-US" sz="1400" dirty="0">
                 <a:solidFill>
@@ -18944,9 +18404,6 @@
               </a:rPr>
               <a:t> sound — </a:t>
             </a:r>
-            <a:pPr algn="l" indent="0" marL="0">
-              <a:buNone/>
-            </a:pPr>
             <a:r>
               <a:rPr lang="en-US" sz="1400" b="1" dirty="0">
                 <a:solidFill>
@@ -18958,9 +18415,6 @@
               </a:rPr>
               <a:t>走</a:t>
             </a:r>
-            <a:pPr algn="l" indent="0" marL="0">
-              <a:buNone/>
-            </a:pPr>
             <a:r>
               <a:rPr lang="en-US" sz="1400" dirty="0">
                 <a:solidFill>
@@ -18972,9 +18426,6 @@
               </a:rPr>
               <a:t> or </a:t>
             </a:r>
-            <a:pPr algn="l" indent="0" marL="0">
-              <a:buNone/>
-            </a:pPr>
             <a:r>
               <a:rPr lang="en-US" sz="1400" b="1" dirty="0">
                 <a:solidFill>
@@ -18986,9 +18437,6 @@
               </a:rPr>
               <a:t>说</a:t>
             </a:r>
-            <a:pPr algn="l" indent="0" marL="0">
-              <a:buNone/>
-            </a:pPr>
             <a:r>
               <a:rPr lang="en-US" sz="1400" dirty="0">
                 <a:solidFill>
@@ -19146,9 +18594,6 @@
               </a:rPr>
               <a:t>Fill the gap: </a:t>
             </a:r>
-            <a:pPr algn="l" indent="0" marL="0">
-              <a:buNone/>
-            </a:pPr>
             <a:r>
               <a:rPr lang="en-US" sz="1600" b="1" dirty="0">
                 <a:solidFill>
@@ -19160,9 +18605,6 @@
               </a:rPr>
               <a:t>他每天跑____步。</a:t>
             </a:r>
-            <a:pPr algn="l" indent="0" marL="0">
-              <a:buNone/>
-            </a:pPr>
             <a:r>
               <a:rPr lang="en-US" sz="1400" dirty="0">
                 <a:solidFill>
@@ -19320,9 +18762,6 @@
               </a:rPr>
               <a:t>True or false: </a:t>
             </a:r>
-            <a:pPr algn="l" indent="0" marL="0">
-              <a:buNone/>
-            </a:pPr>
             <a:r>
               <a:rPr lang="en-US" sz="1400" b="1" dirty="0">
                 <a:solidFill>
@@ -21095,9 +20534,6 @@
               </a:rPr>
               <a:t>Listen</a:t>
             </a:r>
-            <a:pPr algn="l" indent="0" marL="0">
-              <a:buNone/>
-            </a:pPr>
             <a:r>
               <a:rPr lang="en-US" sz="1100" dirty="0">
                 <a:solidFill>
@@ -21223,9 +20659,6 @@
               </a:rPr>
               <a:t>Write</a:t>
             </a:r>
-            <a:pPr algn="l" indent="0" marL="0">
-              <a:buNone/>
-            </a:pPr>
             <a:r>
               <a:rPr lang="en-US" sz="1100" dirty="0">
                 <a:solidFill>
@@ -21351,9 +20784,6 @@
               </a:rPr>
               <a:t>Hold up</a:t>
             </a:r>
-            <a:pPr algn="l" indent="0" marL="0">
-              <a:buNone/>
-            </a:pPr>
             <a:r>
               <a:rPr lang="en-US" sz="1100" dirty="0">
                 <a:solidFill>
@@ -21479,9 +20909,6 @@
               </a:rPr>
               <a:t>ou</a:t>
             </a:r>
-            <a:pPr algn="l" indent="0" marL="0">
-              <a:buNone/>
-            </a:pPr>
             <a:r>
               <a:rPr lang="en-US" sz="1200" dirty="0">
                 <a:solidFill>
@@ -21493,9 +20920,6 @@
               </a:rPr>
               <a:t> </a:t>
             </a:r>
-            <a:pPr algn="l" indent="0" marL="0">
-              <a:buNone/>
-            </a:pPr>
             <a:r>
               <a:rPr lang="en-US" sz="1200" dirty="0">
                 <a:solidFill>
@@ -21546,9 +20970,6 @@
               </a:rPr>
               <a:t>uo</a:t>
             </a:r>
-            <a:pPr algn="l" indent="0" marL="0">
-              <a:buNone/>
-            </a:pPr>
             <a:r>
               <a:rPr lang="en-US" sz="1200" dirty="0">
                 <a:solidFill>
@@ -21560,9 +20981,6 @@
               </a:rPr>
               <a:t> </a:t>
             </a:r>
-            <a:pPr algn="l" indent="0" marL="0">
-              <a:buNone/>
-            </a:pPr>
             <a:r>
               <a:rPr lang="en-US" sz="1200" dirty="0">
                 <a:solidFill>
